--- a/docs/pptx/whole/ritu-egfr-diffpct-hist.pptx
+++ b/docs/pptx/whole/ritu-egfr-diffpct-hist.pptx
@@ -2271,7 +2271,7 @@
           </p:nvSpPr>
           <p:spPr>
             <a:xfrm>
-              <a:off x="915645" y="4886166"/>
+              <a:off x="915645" y="4887906"/>
               <a:ext cx="7682587" cy="0"/>
             </a:xfrm>
             <a:custGeom>
@@ -2314,7 +2314,7 @@
           </p:nvSpPr>
           <p:spPr>
             <a:xfrm>
-              <a:off x="915645" y="3762398"/>
+              <a:off x="915645" y="3767616"/>
               <a:ext cx="7682587" cy="0"/>
             </a:xfrm>
             <a:custGeom>
@@ -2357,7 +2357,7 @@
           </p:nvSpPr>
           <p:spPr>
             <a:xfrm>
-              <a:off x="915645" y="2638629"/>
+              <a:off x="915645" y="2647327"/>
               <a:ext cx="7682587" cy="0"/>
             </a:xfrm>
             <a:custGeom>
@@ -2959,7 +2959,7 @@
           </p:nvSpPr>
           <p:spPr>
             <a:xfrm>
-              <a:off x="915645" y="4324282"/>
+              <a:off x="915645" y="4327761"/>
               <a:ext cx="7682587" cy="0"/>
             </a:xfrm>
             <a:custGeom>
@@ -3002,7 +3002,7 @@
           </p:nvSpPr>
           <p:spPr>
             <a:xfrm>
-              <a:off x="915645" y="3200513"/>
+              <a:off x="915645" y="3207472"/>
               <a:ext cx="7682587" cy="0"/>
             </a:xfrm>
             <a:custGeom>
@@ -3045,7 +3045,7 @@
           </p:nvSpPr>
           <p:spPr>
             <a:xfrm>
-              <a:off x="915645" y="2076745"/>
+              <a:off x="915645" y="2087182"/>
               <a:ext cx="7682587" cy="0"/>
             </a:xfrm>
             <a:custGeom>
@@ -4032,8 +4032,8 @@
           </p:nvSpPr>
           <p:spPr>
             <a:xfrm>
-              <a:off x="2612675" y="4578261"/>
-              <a:ext cx="122529" cy="869789"/>
+              <a:off x="2612675" y="4752219"/>
+              <a:ext cx="122529" cy="695831"/>
             </a:xfrm>
             <a:prstGeom prst="rect">
               <a:avLst/>
@@ -7726,7 +7726,7 @@
           </p:nvSpPr>
           <p:spPr>
             <a:xfrm>
-              <a:off x="756929" y="4273304"/>
+              <a:off x="756929" y="4276783"/>
               <a:ext cx="79004" cy="101955"/>
             </a:xfrm>
             <a:prstGeom prst="rect">
@@ -7772,7 +7772,7 @@
           </p:nvSpPr>
           <p:spPr>
             <a:xfrm>
-              <a:off x="756929" y="3149536"/>
+              <a:off x="756929" y="3156494"/>
               <a:ext cx="79004" cy="101955"/>
             </a:xfrm>
             <a:prstGeom prst="rect">
@@ -7818,7 +7818,7 @@
           </p:nvSpPr>
           <p:spPr>
             <a:xfrm>
-              <a:off x="756929" y="2025767"/>
+              <a:off x="756929" y="2036205"/>
               <a:ext cx="79004" cy="101955"/>
             </a:xfrm>
             <a:prstGeom prst="rect">
